--- a/classes/parte-16-capstones-y-preparacion-de-certificaciones/304-preparacion-cissp-los-8-dominios/clase-304-presentacion.pptx
+++ b/classes/parte-16-capstones-y-preparacion-de-certificaciones/304-preparacion-cissp-los-8-dominios/clase-304-presentacion.pptx
@@ -17,6 +17,10 @@
     <p:sldId id="265" r:id="rId16"/>
     <p:sldId id="266" r:id="rId17"/>
     <p:sldId id="267" r:id="rId18"/>
+    <p:sldId id="268" r:id="rId19"/>
+    <p:sldId id="269" r:id="rId20"/>
+    <p:sldId id="270" r:id="rId21"/>
+    <p:sldId id="271" r:id="rId22"/>
   </p:sldIdLst>
   <p:sldSz cx="9144000" cy="6858000" type="screen4x3"/>
   <p:notesSz cx="6858000" cy="9144000"/>
@@ -3198,7 +3202,7 @@
                   <a:srgbClr val="0B3D2E"/>
                 </a:solidFill>
               </a:rPr>
-              <a:t>⚠️ Errores comunes</a:t>
+              <a:t>🧪 Laboratorio guiado (ejercicio aplicado)</a:t>
             </a:r>
           </a:p>
         </p:txBody>
@@ -3236,67 +3240,97 @@
                   <a:srgbClr val="22282E"/>
                 </a:solidFill>
               </a:rPr>
-              <a:t>•  "Respondo como técnico" — El CISSP pide mentalidad de gestión; elige la respuesta de riesgo/negocio.</a:t>
-            </a:r>
-          </a:p>
-          <a:p>
-            <a:pPr>
-              <a:spcAft>
-                <a:spcPts val="600"/>
-              </a:spcAft>
-            </a:pPr>
-            <a:r>
-              <a:rPr sz="1500">
-                <a:solidFill>
-                  <a:srgbClr val="22282E"/>
-                </a:solidFill>
-              </a:rPr>
-              <a:t>•  "Memorizo sin entender" — El CAT castiga el memorismo; comprende los principios.</a:t>
-            </a:r>
-          </a:p>
-          <a:p>
-            <a:pPr>
-              <a:spcAft>
-                <a:spcPts val="600"/>
-              </a:spcAft>
-            </a:pPr>
-            <a:r>
-              <a:rPr sz="1500">
-                <a:solidFill>
-                  <a:srgbClr val="22282E"/>
-                </a:solidFill>
-              </a:rPr>
-              <a:t>•  "No cubro todos los dominios" — Estudio desbalanceado; usa la matriz de brechas para equilibrar.</a:t>
-            </a:r>
-          </a:p>
-          <a:p>
-            <a:pPr>
-              <a:spcAft>
-                <a:spcPts val="600"/>
-              </a:spcAft>
-            </a:pPr>
-            <a:r>
-              <a:rPr sz="1500">
-                <a:solidFill>
-                  <a:srgbClr val="22282E"/>
-                </a:solidFill>
-              </a:rPr>
-              <a:t>•  "Aprobé pero no me certifican" — Falta endorsement; necesitas 5 años de experiencia.</a:t>
-            </a:r>
-          </a:p>
-          <a:p>
-            <a:pPr>
-              <a:spcAft>
-                <a:spcPts val="600"/>
-              </a:spcAft>
-            </a:pPr>
-            <a:r>
-              <a:rPr sz="1500">
-                <a:solidFill>
-                  <a:srgbClr val="22282E"/>
-                </a:solidFill>
-              </a:rPr>
-              <a:t>•  "Me confunden due care/diligence" — Concepto sutil; due diligence investiga, due care actúa.</a:t>
+              <a:t>•  Construye la tabla de los 8 dominios con su peso porcentual y 3 subtemas clave de cada uno.</a:t>
+            </a:r>
+          </a:p>
+          <a:p>
+            <a:pPr>
+              <a:spcAft>
+                <a:spcPts val="600"/>
+              </a:spcAft>
+            </a:pPr>
+            <a:r>
+              <a:rPr sz="1500">
+                <a:solidFill>
+                  <a:srgbClr val="22282E"/>
+                </a:solidFill>
+              </a:rPr>
+              <a:t>•  Mapea a tu programa. Ejemplo: D4 ↔ Partes 2–3 (redes), D6 ↔ Partes 6–9 (testing), D7 ↔ Partes 10–13 (Blue Team/DFIR), D8 ↔ Parte 14 (DevSecOps).</a:t>
+            </a:r>
+          </a:p>
+          <a:p>
+            <a:pPr>
+              <a:spcAft>
+                <a:spcPts val="600"/>
+              </a:spcAft>
+            </a:pPr>
+            <a:r>
+              <a:rPr sz="1500">
+                <a:solidFill>
+                  <a:srgbClr val="22282E"/>
+                </a:solidFill>
+              </a:rPr>
+              <a:t>•  Autoevalúate. Para cada dominio, puntúa tu dominio de 1 a 5 y anota la brecha.</a:t>
+            </a:r>
+          </a:p>
+          <a:p>
+            <a:pPr>
+              <a:spcAft>
+                <a:spcPts val="600"/>
+              </a:spcAft>
+            </a:pPr>
+            <a:r>
+              <a:rPr sz="1500">
+                <a:solidFill>
+                  <a:srgbClr val="22282E"/>
+                </a:solidFill>
+              </a:rPr>
+              <a:t>•  Practica la mentalidad manager. Toma 5 preguntas de práctica y, para cada una, pregúntate: "¿cuál es la respuesta de gestión de riesgo, no la técnica inmediata?".</a:t>
+            </a:r>
+          </a:p>
+          <a:p>
+            <a:pPr>
+              <a:spcAft>
+                <a:spcPts val="600"/>
+              </a:spcAft>
+            </a:pPr>
+            <a:r>
+              <a:rPr sz="1500">
+                <a:solidFill>
+                  <a:srgbClr val="22282E"/>
+                </a:solidFill>
+              </a:rPr>
+              <a:t>•  Estudia due care/due diligence y redacta un ejemplo propio de cada uno.</a:t>
+            </a:r>
+          </a:p>
+          <a:p>
+            <a:pPr>
+              <a:spcAft>
+                <a:spcPts val="600"/>
+              </a:spcAft>
+            </a:pPr>
+            <a:r>
+              <a:rPr sz="1500">
+                <a:solidFill>
+                  <a:srgbClr val="22282E"/>
+                </a:solidFill>
+              </a:rPr>
+              <a:t>•  Diseña el plan. Asigna semanas por dominio priorizando tus brechas mayores.</a:t>
+            </a:r>
+          </a:p>
+          <a:p>
+            <a:pPr>
+              <a:spcAft>
+                <a:spcPts val="600"/>
+              </a:spcAft>
+            </a:pPr>
+            <a:r>
+              <a:rPr sz="1500">
+                <a:solidFill>
+                  <a:srgbClr val="22282E"/>
+                </a:solidFill>
+              </a:rPr>
+              <a:t>•  Simula. Haz un test de práctica de 50 preguntas y calcula tu porcentaje por dominio.</a:t>
             </a:r>
           </a:p>
         </p:txBody>
@@ -3347,7 +3381,7 @@
                   <a:srgbClr val="0B3D2E"/>
                 </a:solidFill>
               </a:rPr>
-              <a:t>❓ Preguntas frecuentes</a:t>
+              <a:t>✍️ Ejercicios</a:t>
             </a:r>
           </a:p>
         </p:txBody>
@@ -3385,97 +3419,82 @@
                   <a:srgbClr val="22282E"/>
                 </a:solidFill>
               </a:rPr>
-              <a:t>•  ❓ ¿Necesito experiencia para presentarme?</a:t>
-            </a:r>
-          </a:p>
-          <a:p>
-            <a:pPr>
-              <a:spcAft>
-                <a:spcPts val="600"/>
-              </a:spcAft>
-            </a:pPr>
-            <a:r>
-              <a:rPr sz="1500">
-                <a:solidFill>
-                  <a:srgbClr val="22282E"/>
-                </a:solidFill>
-              </a:rPr>
-              <a:t>•  Puedes examinarte sin ella, pero para certificarte necesitas 5 años en 2+ dominios (o 4 con una titulación/certificación aprobada).</a:t>
-            </a:r>
-          </a:p>
-          <a:p>
-            <a:pPr>
-              <a:spcAft>
-                <a:spcPts val="600"/>
-              </a:spcAft>
-            </a:pPr>
-            <a:r>
-              <a:rPr sz="1500">
-                <a:solidFill>
-                  <a:srgbClr val="22282E"/>
-                </a:solidFill>
-              </a:rPr>
-              <a:t>•  ❓ ¿Cuánto tiempo de estudio?</a:t>
-            </a:r>
-          </a:p>
-          <a:p>
-            <a:pPr>
-              <a:spcAft>
-                <a:spcPts val="600"/>
-              </a:spcAft>
-            </a:pPr>
-            <a:r>
-              <a:rPr sz="1500">
-                <a:solidFill>
-                  <a:srgbClr val="22282E"/>
-                </a:solidFill>
-              </a:rPr>
-              <a:t>•  Con base técnica del programa, 3–6 meses enfocado en la mentalidad de gestión y los dominios débiles.</a:t>
-            </a:r>
-          </a:p>
-          <a:p>
-            <a:pPr>
-              <a:spcAft>
-                <a:spcPts val="600"/>
-              </a:spcAft>
-            </a:pPr>
-            <a:r>
-              <a:rPr sz="1500">
-                <a:solidFill>
-                  <a:srgbClr val="22282E"/>
-                </a:solidFill>
-              </a:rPr>
-              <a:t>•  ❓ ¿Es un examen técnico?</a:t>
-            </a:r>
-          </a:p>
-          <a:p>
-            <a:pPr>
-              <a:spcAft>
-                <a:spcPts val="600"/>
-              </a:spcAft>
-            </a:pPr>
-            <a:r>
-              <a:rPr sz="1500">
-                <a:solidFill>
-                  <a:srgbClr val="22282E"/>
-                </a:solidFill>
-              </a:rPr>
-              <a:t>•  No en el sentido de comandos. Evalúa comprensión conceptual y toma de decisiones de riesgo.</a:t>
-            </a:r>
-          </a:p>
-          <a:p>
-            <a:pPr>
-              <a:spcAft>
-                <a:spcPts val="600"/>
-              </a:spcAft>
-            </a:pPr>
-            <a:r>
-              <a:rPr sz="1500">
-                <a:solidFill>
-                  <a:srgbClr val="22282E"/>
-                </a:solidFill>
-              </a:rPr>
-              <a:t>•  ❓ ¿Qué dominio pesa más?</a:t>
+              <a:t>•  Escribe la tabla de dominios con pesos y subtemas.</a:t>
+            </a:r>
+          </a:p>
+          <a:p>
+            <a:pPr>
+              <a:spcAft>
+                <a:spcPts val="600"/>
+              </a:spcAft>
+            </a:pPr>
+            <a:r>
+              <a:rPr sz="1500">
+                <a:solidFill>
+                  <a:srgbClr val="22282E"/>
+                </a:solidFill>
+              </a:rPr>
+              <a:t>•  Explica con tus palabras la diferencia entre due care y due diligence.</a:t>
+            </a:r>
+          </a:p>
+          <a:p>
+            <a:pPr>
+              <a:spcAft>
+                <a:spcPts val="600"/>
+              </a:spcAft>
+            </a:pPr>
+            <a:r>
+              <a:rPr sz="1500">
+                <a:solidFill>
+                  <a:srgbClr val="22282E"/>
+                </a:solidFill>
+              </a:rPr>
+              <a:t>•  Mapea los 8 dominios a las partes del programa.</a:t>
+            </a:r>
+          </a:p>
+          <a:p>
+            <a:pPr>
+              <a:spcAft>
+                <a:spcPts val="600"/>
+              </a:spcAft>
+            </a:pPr>
+            <a:r>
+              <a:rPr sz="1500">
+                <a:solidFill>
+                  <a:srgbClr val="22282E"/>
+                </a:solidFill>
+              </a:rPr>
+              <a:t>•  Resuelve 20 preguntas de práctica y clasifica tus fallos por dominio.</a:t>
+            </a:r>
+          </a:p>
+          <a:p>
+            <a:pPr>
+              <a:spcAft>
+                <a:spcPts val="600"/>
+              </a:spcAft>
+            </a:pPr>
+            <a:r>
+              <a:rPr sz="1500">
+                <a:solidFill>
+                  <a:srgbClr val="22282E"/>
+                </a:solidFill>
+              </a:rPr>
+              <a:t>•  Redacta una política de clasificación de datos (D2) de una página.</a:t>
+            </a:r>
+          </a:p>
+          <a:p>
+            <a:pPr>
+              <a:spcAft>
+                <a:spcPts val="600"/>
+              </a:spcAft>
+            </a:pPr>
+            <a:r>
+              <a:rPr sz="1500">
+                <a:solidFill>
+                  <a:srgbClr val="22282E"/>
+                </a:solidFill>
+              </a:rPr>
+              <a:t>•  Diseña una matriz de riesgo simple (probabilidad × impacto) para un activo.</a:t>
             </a:r>
           </a:p>
         </p:txBody>
@@ -3526,7 +3545,7 @@
                   <a:srgbClr val="0B3D2E"/>
                 </a:solidFill>
               </a:rPr>
-              <a:t>🔗 Referencias</a:t>
+              <a:t>📝 Reto verificable</a:t>
             </a:r>
           </a:p>
         </p:txBody>
@@ -3564,6 +3583,438 @@
                   <a:srgbClr val="22282E"/>
                 </a:solidFill>
               </a:rPr>
+              <a:t>•  Entrega una matriz de preparación CISSP (plan-cissp.md) con: los 8 dominios, tu autoevaluación (1–5) por dominio, la brecha identificada, el mapeo a partes del programa y un plan de estudio semanal…</a:t>
+            </a:r>
+          </a:p>
+          <a:p>
+            <a:pPr>
+              <a:spcAft>
+                <a:spcPts val="600"/>
+              </a:spcAft>
+            </a:pPr>
+            <a:r>
+              <a:rPr sz="1500">
+                <a:solidFill>
+                  <a:srgbClr val="22282E"/>
+                </a:solidFill>
+              </a:rPr>
+              <a:t>•  Criterio de aceptación: los 8 dominios están cubiertos, cada uno tiene autoevaluación y plan, el mapeo a partes es coherente, y el plan prioriza las brechas mayores con fechas concretas.</a:t>
+            </a:r>
+          </a:p>
+        </p:txBody>
+      </p:sp>
+    </p:spTree>
+  </p:cSld>
+  <p:clrMapOvr>
+    <a:masterClrMapping/>
+  </p:clrMapOvr>
+</p:sld>
+</file>
+
+<file path=ppt/slides/slide13.xml><?xml version="1.0" encoding="utf-8"?>
+<p:sld xmlns:a="http://schemas.openxmlformats.org/drawingml/2006/main" xmlns:p="http://schemas.openxmlformats.org/presentationml/2006/main" xmlns:r="http://schemas.openxmlformats.org/officeDocument/2006/relationships">
+  <p:cSld>
+    <p:spTree>
+      <p:nvGrpSpPr>
+        <p:cNvPr id="1" name=""/>
+        <p:cNvGrpSpPr/>
+        <p:nvPr/>
+      </p:nvGrpSpPr>
+      <p:grpSpPr/>
+      <p:sp>
+        <p:nvSpPr>
+          <p:cNvPr id="2" name="TextBox 1"/>
+          <p:cNvSpPr txBox="1"/>
+          <p:nvPr/>
+        </p:nvSpPr>
+        <p:spPr>
+          <a:xfrm>
+            <a:off x="457200" y="320040"/>
+            <a:ext cx="8229600" cy="822960"/>
+          </a:xfrm>
+          <a:prstGeom prst="rect">
+            <a:avLst/>
+          </a:prstGeom>
+          <a:noFill/>
+        </p:spPr>
+        <p:txBody>
+          <a:bodyPr wrap="square">
+            <a:spAutoFit/>
+          </a:bodyPr>
+          <a:lstStyle/>
+          <a:p>
+            <a:r>
+              <a:rPr sz="2600" b="1">
+                <a:solidFill>
+                  <a:srgbClr val="0B3D2E"/>
+                </a:solidFill>
+              </a:rPr>
+              <a:t>⚠️ Errores comunes</a:t>
+            </a:r>
+          </a:p>
+        </p:txBody>
+      </p:sp>
+      <p:sp>
+        <p:nvSpPr>
+          <p:cNvPr id="3" name="TextBox 2"/>
+          <p:cNvSpPr txBox="1"/>
+          <p:nvPr/>
+        </p:nvSpPr>
+        <p:spPr>
+          <a:xfrm>
+            <a:off x="457200" y="1280160"/>
+            <a:ext cx="8229600" cy="4937760"/>
+          </a:xfrm>
+          <a:prstGeom prst="rect">
+            <a:avLst/>
+          </a:prstGeom>
+          <a:noFill/>
+        </p:spPr>
+        <p:txBody>
+          <a:bodyPr wrap="square">
+            <a:spAutoFit/>
+          </a:bodyPr>
+          <a:lstStyle/>
+          <a:p>
+            <a:pPr>
+              <a:spcAft>
+                <a:spcPts val="600"/>
+              </a:spcAft>
+            </a:pPr>
+            <a:r>
+              <a:rPr sz="1500">
+                <a:solidFill>
+                  <a:srgbClr val="22282E"/>
+                </a:solidFill>
+              </a:rPr>
+              <a:t>•  "Respondo como técnico" — El CISSP pide mentalidad de gestión; elige la respuesta de riesgo/negocio.</a:t>
+            </a:r>
+          </a:p>
+          <a:p>
+            <a:pPr>
+              <a:spcAft>
+                <a:spcPts val="600"/>
+              </a:spcAft>
+            </a:pPr>
+            <a:r>
+              <a:rPr sz="1500">
+                <a:solidFill>
+                  <a:srgbClr val="22282E"/>
+                </a:solidFill>
+              </a:rPr>
+              <a:t>•  "Memorizo sin entender" — El CAT castiga el memorismo; comprende los principios.</a:t>
+            </a:r>
+          </a:p>
+          <a:p>
+            <a:pPr>
+              <a:spcAft>
+                <a:spcPts val="600"/>
+              </a:spcAft>
+            </a:pPr>
+            <a:r>
+              <a:rPr sz="1500">
+                <a:solidFill>
+                  <a:srgbClr val="22282E"/>
+                </a:solidFill>
+              </a:rPr>
+              <a:t>•  "No cubro todos los dominios" — Estudio desbalanceado; usa la matriz de brechas para equilibrar.</a:t>
+            </a:r>
+          </a:p>
+          <a:p>
+            <a:pPr>
+              <a:spcAft>
+                <a:spcPts val="600"/>
+              </a:spcAft>
+            </a:pPr>
+            <a:r>
+              <a:rPr sz="1500">
+                <a:solidFill>
+                  <a:srgbClr val="22282E"/>
+                </a:solidFill>
+              </a:rPr>
+              <a:t>•  "Aprobé pero no me certifican" — Falta endorsement; necesitas 5 años de experiencia.</a:t>
+            </a:r>
+          </a:p>
+          <a:p>
+            <a:pPr>
+              <a:spcAft>
+                <a:spcPts val="600"/>
+              </a:spcAft>
+            </a:pPr>
+            <a:r>
+              <a:rPr sz="1500">
+                <a:solidFill>
+                  <a:srgbClr val="22282E"/>
+                </a:solidFill>
+              </a:rPr>
+              <a:t>•  "Me confunden due care/diligence" — Concepto sutil; due diligence investiga, due care actúa.</a:t>
+            </a:r>
+          </a:p>
+        </p:txBody>
+      </p:sp>
+    </p:spTree>
+  </p:cSld>
+  <p:clrMapOvr>
+    <a:masterClrMapping/>
+  </p:clrMapOvr>
+</p:sld>
+</file>
+
+<file path=ppt/slides/slide14.xml><?xml version="1.0" encoding="utf-8"?>
+<p:sld xmlns:a="http://schemas.openxmlformats.org/drawingml/2006/main" xmlns:p="http://schemas.openxmlformats.org/presentationml/2006/main" xmlns:r="http://schemas.openxmlformats.org/officeDocument/2006/relationships">
+  <p:cSld>
+    <p:spTree>
+      <p:nvGrpSpPr>
+        <p:cNvPr id="1" name=""/>
+        <p:cNvGrpSpPr/>
+        <p:nvPr/>
+      </p:nvGrpSpPr>
+      <p:grpSpPr/>
+      <p:sp>
+        <p:nvSpPr>
+          <p:cNvPr id="2" name="TextBox 1"/>
+          <p:cNvSpPr txBox="1"/>
+          <p:nvPr/>
+        </p:nvSpPr>
+        <p:spPr>
+          <a:xfrm>
+            <a:off x="457200" y="320040"/>
+            <a:ext cx="8229600" cy="822960"/>
+          </a:xfrm>
+          <a:prstGeom prst="rect">
+            <a:avLst/>
+          </a:prstGeom>
+          <a:noFill/>
+        </p:spPr>
+        <p:txBody>
+          <a:bodyPr wrap="square">
+            <a:spAutoFit/>
+          </a:bodyPr>
+          <a:lstStyle/>
+          <a:p>
+            <a:r>
+              <a:rPr sz="2600" b="1">
+                <a:solidFill>
+                  <a:srgbClr val="0B3D2E"/>
+                </a:solidFill>
+              </a:rPr>
+              <a:t>❓ Preguntas frecuentes</a:t>
+            </a:r>
+          </a:p>
+        </p:txBody>
+      </p:sp>
+      <p:sp>
+        <p:nvSpPr>
+          <p:cNvPr id="3" name="TextBox 2"/>
+          <p:cNvSpPr txBox="1"/>
+          <p:nvPr/>
+        </p:nvSpPr>
+        <p:spPr>
+          <a:xfrm>
+            <a:off x="457200" y="1280160"/>
+            <a:ext cx="8229600" cy="4937760"/>
+          </a:xfrm>
+          <a:prstGeom prst="rect">
+            <a:avLst/>
+          </a:prstGeom>
+          <a:noFill/>
+        </p:spPr>
+        <p:txBody>
+          <a:bodyPr wrap="square">
+            <a:spAutoFit/>
+          </a:bodyPr>
+          <a:lstStyle/>
+          <a:p>
+            <a:pPr>
+              <a:spcAft>
+                <a:spcPts val="600"/>
+              </a:spcAft>
+            </a:pPr>
+            <a:r>
+              <a:rPr sz="1500">
+                <a:solidFill>
+                  <a:srgbClr val="22282E"/>
+                </a:solidFill>
+              </a:rPr>
+              <a:t>•  ❓ ¿Necesito experiencia para presentarme?</a:t>
+            </a:r>
+          </a:p>
+          <a:p>
+            <a:pPr>
+              <a:spcAft>
+                <a:spcPts val="600"/>
+              </a:spcAft>
+            </a:pPr>
+            <a:r>
+              <a:rPr sz="1500">
+                <a:solidFill>
+                  <a:srgbClr val="22282E"/>
+                </a:solidFill>
+              </a:rPr>
+              <a:t>•  Puedes examinarte sin ella, pero para certificarte necesitas 5 años en 2+ dominios (o 4 con una titulación/certificación aprobada).</a:t>
+            </a:r>
+          </a:p>
+          <a:p>
+            <a:pPr>
+              <a:spcAft>
+                <a:spcPts val="600"/>
+              </a:spcAft>
+            </a:pPr>
+            <a:r>
+              <a:rPr sz="1500">
+                <a:solidFill>
+                  <a:srgbClr val="22282E"/>
+                </a:solidFill>
+              </a:rPr>
+              <a:t>•  ❓ ¿Cuánto tiempo de estudio?</a:t>
+            </a:r>
+          </a:p>
+          <a:p>
+            <a:pPr>
+              <a:spcAft>
+                <a:spcPts val="600"/>
+              </a:spcAft>
+            </a:pPr>
+            <a:r>
+              <a:rPr sz="1500">
+                <a:solidFill>
+                  <a:srgbClr val="22282E"/>
+                </a:solidFill>
+              </a:rPr>
+              <a:t>•  Con base técnica del programa, 3–6 meses enfocado en la mentalidad de gestión y los dominios débiles.</a:t>
+            </a:r>
+          </a:p>
+          <a:p>
+            <a:pPr>
+              <a:spcAft>
+                <a:spcPts val="600"/>
+              </a:spcAft>
+            </a:pPr>
+            <a:r>
+              <a:rPr sz="1500">
+                <a:solidFill>
+                  <a:srgbClr val="22282E"/>
+                </a:solidFill>
+              </a:rPr>
+              <a:t>•  ❓ ¿Es un examen técnico?</a:t>
+            </a:r>
+          </a:p>
+          <a:p>
+            <a:pPr>
+              <a:spcAft>
+                <a:spcPts val="600"/>
+              </a:spcAft>
+            </a:pPr>
+            <a:r>
+              <a:rPr sz="1500">
+                <a:solidFill>
+                  <a:srgbClr val="22282E"/>
+                </a:solidFill>
+              </a:rPr>
+              <a:t>•  No en el sentido de comandos. Evalúa comprensión conceptual y toma de decisiones de riesgo.</a:t>
+            </a:r>
+          </a:p>
+          <a:p>
+            <a:pPr>
+              <a:spcAft>
+                <a:spcPts val="600"/>
+              </a:spcAft>
+            </a:pPr>
+            <a:r>
+              <a:rPr sz="1500">
+                <a:solidFill>
+                  <a:srgbClr val="22282E"/>
+                </a:solidFill>
+              </a:rPr>
+              <a:t>•  ❓ ¿Qué dominio pesa más?</a:t>
+            </a:r>
+          </a:p>
+        </p:txBody>
+      </p:sp>
+    </p:spTree>
+  </p:cSld>
+  <p:clrMapOvr>
+    <a:masterClrMapping/>
+  </p:clrMapOvr>
+</p:sld>
+</file>
+
+<file path=ppt/slides/slide15.xml><?xml version="1.0" encoding="utf-8"?>
+<p:sld xmlns:a="http://schemas.openxmlformats.org/drawingml/2006/main" xmlns:p="http://schemas.openxmlformats.org/presentationml/2006/main" xmlns:r="http://schemas.openxmlformats.org/officeDocument/2006/relationships">
+  <p:cSld>
+    <p:spTree>
+      <p:nvGrpSpPr>
+        <p:cNvPr id="1" name=""/>
+        <p:cNvGrpSpPr/>
+        <p:nvPr/>
+      </p:nvGrpSpPr>
+      <p:grpSpPr/>
+      <p:sp>
+        <p:nvSpPr>
+          <p:cNvPr id="2" name="TextBox 1"/>
+          <p:cNvSpPr txBox="1"/>
+          <p:nvPr/>
+        </p:nvSpPr>
+        <p:spPr>
+          <a:xfrm>
+            <a:off x="457200" y="320040"/>
+            <a:ext cx="8229600" cy="822960"/>
+          </a:xfrm>
+          <a:prstGeom prst="rect">
+            <a:avLst/>
+          </a:prstGeom>
+          <a:noFill/>
+        </p:spPr>
+        <p:txBody>
+          <a:bodyPr wrap="square">
+            <a:spAutoFit/>
+          </a:bodyPr>
+          <a:lstStyle/>
+          <a:p>
+            <a:r>
+              <a:rPr sz="2600" b="1">
+                <a:solidFill>
+                  <a:srgbClr val="0B3D2E"/>
+                </a:solidFill>
+              </a:rPr>
+              <a:t>🔗 Referencias</a:t>
+            </a:r>
+          </a:p>
+        </p:txBody>
+      </p:sp>
+      <p:sp>
+        <p:nvSpPr>
+          <p:cNvPr id="3" name="TextBox 2"/>
+          <p:cNvSpPr txBox="1"/>
+          <p:nvPr/>
+        </p:nvSpPr>
+        <p:spPr>
+          <a:xfrm>
+            <a:off x="457200" y="1280160"/>
+            <a:ext cx="8229600" cy="4937760"/>
+          </a:xfrm>
+          <a:prstGeom prst="rect">
+            <a:avLst/>
+          </a:prstGeom>
+          <a:noFill/>
+        </p:spPr>
+        <p:txBody>
+          <a:bodyPr wrap="square">
+            <a:spAutoFit/>
+          </a:bodyPr>
+          <a:lstStyle/>
+          <a:p>
+            <a:pPr>
+              <a:spcAft>
+                <a:spcPts val="600"/>
+              </a:spcAft>
+            </a:pPr>
+            <a:r>
+              <a:rPr sz="1500">
+                <a:solidFill>
+                  <a:srgbClr val="22282E"/>
+                </a:solidFill>
+              </a:rPr>
               <a:t>•  (ISC)² CISSP: &lt;https://www.isc2.org/certifications/cissp&gt;</a:t>
             </a:r>
           </a:p>
@@ -3629,6 +4080,81 @@
           </a:p>
         </p:txBody>
       </p:sp>
+    </p:spTree>
+  </p:cSld>
+  <p:clrMapOvr>
+    <a:masterClrMapping/>
+  </p:clrMapOvr>
+</p:sld>
+</file>
+
+<file path=ppt/slides/slide16.xml><?xml version="1.0" encoding="utf-8"?>
+<p:sld xmlns:a="http://schemas.openxmlformats.org/drawingml/2006/main" xmlns:p="http://schemas.openxmlformats.org/presentationml/2006/main" xmlns:r="http://schemas.openxmlformats.org/officeDocument/2006/relationships">
+  <p:cSld>
+    <p:spTree>
+      <p:nvGrpSpPr>
+        <p:cNvPr id="1" name=""/>
+        <p:cNvGrpSpPr/>
+        <p:nvPr/>
+      </p:nvGrpSpPr>
+      <p:grpSpPr/>
+      <p:sp>
+        <p:nvSpPr>
+          <p:cNvPr id="2" name="TextBox 1"/>
+          <p:cNvSpPr txBox="1"/>
+          <p:nvPr/>
+        </p:nvSpPr>
+        <p:spPr>
+          <a:xfrm>
+            <a:off x="457200" y="274320"/>
+            <a:ext cx="8229600" cy="640080"/>
+          </a:xfrm>
+          <a:prstGeom prst="rect">
+            <a:avLst/>
+          </a:prstGeom>
+          <a:noFill/>
+        </p:spPr>
+        <p:txBody>
+          <a:bodyPr wrap="square">
+            <a:spAutoFit/>
+          </a:bodyPr>
+          <a:lstStyle/>
+          <a:p>
+            <a:r>
+              <a:rPr sz="2200" b="1">
+                <a:solidFill>
+                  <a:srgbClr val="0B3D2E"/>
+                </a:solidFill>
+              </a:rPr>
+              <a:t>Diagrama de la clase</a:t>
+            </a:r>
+          </a:p>
+        </p:txBody>
+      </p:sp>
+      <p:pic>
+        <p:nvPicPr>
+          <p:cNvPr id="3" name="Picture 2" descr="686ea70b26fc99b3.png"/>
+          <p:cNvPicPr>
+            <a:picLocks noChangeAspect="1"/>
+          </p:cNvPicPr>
+          <p:nvPr/>
+        </p:nvPicPr>
+        <p:blipFill>
+          <a:blip r:embed="rId2"/>
+          <a:stretch>
+            <a:fillRect/>
+          </a:stretch>
+        </p:blipFill>
+        <p:spPr>
+          <a:xfrm>
+            <a:off x="457200" y="3326700"/>
+            <a:ext cx="8229599" cy="844680"/>
+          </a:xfrm>
+          <a:prstGeom prst="rect">
+            <a:avLst/>
+          </a:prstGeom>
+        </p:spPr>
+      </p:pic>
     </p:spTree>
   </p:cSld>
   <p:clrMapOvr>
@@ -3713,7 +4239,7 @@
                   <a:srgbClr val="22282E"/>
                 </a:solidFill>
               </a:rPr>
-              <a:t>•  Que el alumno obtenga un mapa completo de los 8 dominios del CISSP, entienda su peso relativo en el examen y la mentalidad "manager" que exige (pensar en riesgo y negocio antes que en la solución técnica), y elabore un plan de estudio con autoevaluación por dominio. El CISSP valida la capacidad de diseñar y gestionar un programa de seguridad, no de explotar sistemas.</a:t>
+              <a:t>•  Que el alumno obtenga un mapa completo de los 8 dominios del CISSP, entienda su peso relativo en el examen y la mentalidad "manager" que exige (pensar en riesgo y negocio antes que en la solución…</a:t>
             </a:r>
           </a:p>
         </p:txBody>
@@ -4107,7 +4633,7 @@
                   <a:srgbClr val="0B3D2E"/>
                 </a:solidFill>
               </a:rPr>
-              <a:t>📖 Definiciones y características</a:t>
+              <a:t>🧠 Explicación en profundidad</a:t>
             </a:r>
           </a:p>
         </p:txBody>
@@ -4145,82 +4671,22 @@
                   <a:srgbClr val="22282E"/>
                 </a:solidFill>
               </a:rPr>
-              <a:t>•  CBK (Common Body of Knowledge): temario canónico de (ISC)². Característica: organizado en 8 dominios con pesos definidos.</a:t>
-            </a:r>
-          </a:p>
-          <a:p>
-            <a:pPr>
-              <a:spcAft>
-                <a:spcPts val="600"/>
-              </a:spcAft>
-            </a:pPr>
-            <a:r>
-              <a:rPr sz="1500">
-                <a:solidFill>
-                  <a:srgbClr val="22282E"/>
-                </a:solidFill>
-              </a:rPr>
-              <a:t>•  CAT (Computer Adaptive Testing): formato del examen en inglés (100–150 preguntas). Característica: la dificultad se adapta a tus respuestas.</a:t>
-            </a:r>
-          </a:p>
-          <a:p>
-            <a:pPr>
-              <a:spcAft>
-                <a:spcPts val="600"/>
-              </a:spcAft>
-            </a:pPr>
-            <a:r>
-              <a:rPr sz="1500">
-                <a:solidFill>
-                  <a:srgbClr val="22282E"/>
-                </a:solidFill>
-              </a:rPr>
-              <a:t>•  Due care vs due diligence: cuidado razonable frente a investigación previa. Característica: concepto clave y muy preguntado.</a:t>
-            </a:r>
-          </a:p>
-          <a:p>
-            <a:pPr>
-              <a:spcAft>
-                <a:spcPts val="600"/>
-              </a:spcAft>
-            </a:pPr>
-            <a:r>
-              <a:rPr sz="1500">
-                <a:solidFill>
-                  <a:srgbClr val="22282E"/>
-                </a:solidFill>
-              </a:rPr>
-              <a:t>•  Risk = amenaza × vulnerabilidad × impacto: fórmula conceptual de riesgo. Característica: base del D1.</a:t>
-            </a:r>
-          </a:p>
-          <a:p>
-            <a:pPr>
-              <a:spcAft>
-                <a:spcPts val="600"/>
-              </a:spcAft>
-            </a:pPr>
-            <a:r>
-              <a:rPr sz="1500">
-                <a:solidFill>
-                  <a:srgbClr val="22282E"/>
-                </a:solidFill>
-              </a:rPr>
-              <a:t>•  Defense in depth: capas de control redundantes. Característica: principio transversal a todos los dominios.</a:t>
-            </a:r>
-          </a:p>
-          <a:p>
-            <a:pPr>
-              <a:spcAft>
-                <a:spcPts val="600"/>
-              </a:spcAft>
-            </a:pPr>
-            <a:r>
-              <a:rPr sz="1500">
-                <a:solidFill>
-                  <a:srgbClr val="22282E"/>
-                </a:solidFill>
-              </a:rPr>
-              <a:t>•  Endorsement: aval de 5 años de experiencia tras aprobar. Característica: sin él, quedas como Associate of (ISC)².</a:t>
+              <a:t>•  CISSP evalúa razonamiento transversal de gestión y arquitectura; memorizar términos sin distinguir dueño, riesgo y ciclo de vida produce respuestas frágiles. La clase convierte el objetivo en una…</a:t>
+            </a:r>
+          </a:p>
+          <a:p>
+            <a:pPr>
+              <a:spcAft>
+                <a:spcPts val="600"/>
+              </a:spcAft>
+            </a:pPr>
+            <a:r>
+              <a:rPr sz="1500">
+                <a:solidFill>
+                  <a:srgbClr val="22282E"/>
+                </a:solidFill>
+              </a:rPr>
+              <a:t>•  Una opción técnica parece más fuerte, pero contradice seguridad física y continuidad. La decisión integra dominios y prioridad de negocio.</a:t>
             </a:r>
           </a:p>
         </p:txBody>
@@ -4271,7 +4737,7 @@
                   <a:srgbClr val="0B3D2E"/>
                 </a:solidFill>
               </a:rPr>
-              <a:t>🧰 Herramientas y preparación (ejercicio de GRC)</a:t>
+              <a:t>📔 Glosario operativo</a:t>
             </a:r>
           </a:p>
         </p:txBody>
@@ -4309,67 +4775,52 @@
                   <a:srgbClr val="22282E"/>
                 </a:solidFill>
               </a:rPr>
-              <a:t>•  No hay laboratorio técnico; el trabajo es de estudio y autoevaluación:</a:t>
-            </a:r>
-          </a:p>
-          <a:p>
-            <a:pPr>
-              <a:spcAft>
-                <a:spcPts val="600"/>
-              </a:spcAft>
-            </a:pPr>
-            <a:r>
-              <a:rPr sz="1500">
-                <a:solidFill>
-                  <a:srgbClr val="22282E"/>
-                </a:solidFill>
-              </a:rPr>
-              <a:t>•  Guía oficial (CISSP Official Study Guide) y práctica de preguntas (bancos oficiales).</a:t>
-            </a:r>
-          </a:p>
-          <a:p>
-            <a:pPr>
-              <a:spcAft>
-                <a:spcPts val="600"/>
-              </a:spcAft>
-            </a:pPr>
-            <a:r>
-              <a:rPr sz="1500">
-                <a:solidFill>
-                  <a:srgbClr val="22282E"/>
-                </a:solidFill>
-              </a:rPr>
-              <a:t>•  Una hoja de cálculo para la matriz de brechas por dominio.</a:t>
-            </a:r>
-          </a:p>
-          <a:p>
-            <a:pPr>
-              <a:spcAft>
-                <a:spcPts val="600"/>
-              </a:spcAft>
-            </a:pPr>
-            <a:r>
-              <a:rPr sz="1500">
-                <a:solidFill>
-                  <a:srgbClr val="22282E"/>
-                </a:solidFill>
-              </a:rPr>
-              <a:t>•  Mapas mentales por dominio (herramienta como XMind o papel).</a:t>
-            </a:r>
-          </a:p>
-          <a:p>
-            <a:pPr>
-              <a:spcAft>
-                <a:spcPts val="600"/>
-              </a:spcAft>
-            </a:pPr>
-            <a:r>
-              <a:rPr sz="1500">
-                <a:solidFill>
-                  <a:srgbClr val="22282E"/>
-                </a:solidFill>
-              </a:rPr>
-              <a:t>•  Tu registro de progreso de las Partes 1–15 para el mapeo.</a:t>
+              <a:t>•  Término — Definición</a:t>
+            </a:r>
+          </a:p>
+          <a:p>
+            <a:pPr>
+              <a:spcAft>
+                <a:spcPts val="600"/>
+              </a:spcAft>
+            </a:pPr>
+            <a:r>
+              <a:rPr sz="1500">
+                <a:solidFill>
+                  <a:srgbClr val="22282E"/>
+                </a:solidFill>
+              </a:rPr>
+              <a:t>•  CBK — Cuerpo de conocimiento, no sustituto del esquema oficial vigente.</a:t>
+            </a:r>
+          </a:p>
+          <a:p>
+            <a:pPr>
+              <a:spcAft>
+                <a:spcPts val="600"/>
+              </a:spcAft>
+            </a:pPr>
+            <a:r>
+              <a:rPr sz="1500">
+                <a:solidFill>
+                  <a:srgbClr val="22282E"/>
+                </a:solidFill>
+              </a:rPr>
+              <a:t>•  Evidencia — Resultado que otra persona puede revisar y relacionar con un criterio.</a:t>
+            </a:r>
+          </a:p>
+          <a:p>
+            <a:pPr>
+              <a:spcAft>
+                <a:spcPts val="600"/>
+              </a:spcAft>
+            </a:pPr>
+            <a:r>
+              <a:rPr sz="1500">
+                <a:solidFill>
+                  <a:srgbClr val="22282E"/>
+                </a:solidFill>
+              </a:rPr>
+              <a:t>•  Retrospectiva — Revisión de decisiones, límites y siguiente mejora.</a:t>
             </a:r>
           </a:p>
         </p:txBody>
@@ -4420,7 +4871,7 @@
                   <a:srgbClr val="0B3D2E"/>
                 </a:solidFill>
               </a:rPr>
-              <a:t>🧪 Laboratorio guiado (ejercicio aplicado)</a:t>
+              <a:t>✅ Criterio de dominio</a:t>
             </a:r>
           </a:p>
         </p:txBody>
@@ -4458,97 +4909,7 @@
                   <a:srgbClr val="22282E"/>
                 </a:solidFill>
               </a:rPr>
-              <a:t>•  Construye la tabla de los 8 dominios con su peso porcentual y 3 subtemas clave de cada uno.</a:t>
-            </a:r>
-          </a:p>
-          <a:p>
-            <a:pPr>
-              <a:spcAft>
-                <a:spcPts val="600"/>
-              </a:spcAft>
-            </a:pPr>
-            <a:r>
-              <a:rPr sz="1500">
-                <a:solidFill>
-                  <a:srgbClr val="22282E"/>
-                </a:solidFill>
-              </a:rPr>
-              <a:t>•  Mapea a tu programa. Ejemplo: D4 ↔ Partes 2–3 (redes), D6 ↔ Partes 6–9 (testing), D7 ↔ Partes 10–13 (Blue Team/DFIR), D8 ↔ Parte 14 (DevSecOps).</a:t>
-            </a:r>
-          </a:p>
-          <a:p>
-            <a:pPr>
-              <a:spcAft>
-                <a:spcPts val="600"/>
-              </a:spcAft>
-            </a:pPr>
-            <a:r>
-              <a:rPr sz="1500">
-                <a:solidFill>
-                  <a:srgbClr val="22282E"/>
-                </a:solidFill>
-              </a:rPr>
-              <a:t>•  Autoevalúate. Para cada dominio, puntúa tu dominio de 1 a 5 y anota la brecha.</a:t>
-            </a:r>
-          </a:p>
-          <a:p>
-            <a:pPr>
-              <a:spcAft>
-                <a:spcPts val="600"/>
-              </a:spcAft>
-            </a:pPr>
-            <a:r>
-              <a:rPr sz="1500">
-                <a:solidFill>
-                  <a:srgbClr val="22282E"/>
-                </a:solidFill>
-              </a:rPr>
-              <a:t>•  Practica la mentalidad manager. Toma 5 preguntas de práctica y, para cada una, pregúntate: "¿cuál es la respuesta de gestión de riesgo, no la técnica inmediata?".</a:t>
-            </a:r>
-          </a:p>
-          <a:p>
-            <a:pPr>
-              <a:spcAft>
-                <a:spcPts val="600"/>
-              </a:spcAft>
-            </a:pPr>
-            <a:r>
-              <a:rPr sz="1500">
-                <a:solidFill>
-                  <a:srgbClr val="22282E"/>
-                </a:solidFill>
-              </a:rPr>
-              <a:t>•  Estudia due care/due diligence y redacta un ejemplo propio de cada uno.</a:t>
-            </a:r>
-          </a:p>
-          <a:p>
-            <a:pPr>
-              <a:spcAft>
-                <a:spcPts val="600"/>
-              </a:spcAft>
-            </a:pPr>
-            <a:r>
-              <a:rPr sz="1500">
-                <a:solidFill>
-                  <a:srgbClr val="22282E"/>
-                </a:solidFill>
-              </a:rPr>
-              <a:t>•  Diseña el plan. Asigna semanas por dominio priorizando tus brechas mayores.</a:t>
-            </a:r>
-          </a:p>
-          <a:p>
-            <a:pPr>
-              <a:spcAft>
-                <a:spcPts val="600"/>
-              </a:spcAft>
-            </a:pPr>
-            <a:r>
-              <a:rPr sz="1500">
-                <a:solidFill>
-                  <a:srgbClr val="22282E"/>
-                </a:solidFill>
-              </a:rPr>
-              <a:t>•  Simula. Haz un test de práctica de 50 preguntas y calcula tu porcentaje por dominio.</a:t>
+              <a:t>•  El alumno domina la clase cuando planifica, ejecuta y comunica una evidencia completa, respeta alcance y puede defender sus decisiones ante una revisión.</a:t>
             </a:r>
           </a:p>
         </p:txBody>
@@ -4599,7 +4960,7 @@
                   <a:srgbClr val="0B3D2E"/>
                 </a:solidFill>
               </a:rPr>
-              <a:t>✍️ Ejercicios</a:t>
+              <a:t>📖 Definiciones y características</a:t>
             </a:r>
           </a:p>
         </p:txBody>
@@ -4637,82 +4998,82 @@
                   <a:srgbClr val="22282E"/>
                 </a:solidFill>
               </a:rPr>
-              <a:t>•  Escribe la tabla de dominios con pesos y subtemas.</a:t>
-            </a:r>
-          </a:p>
-          <a:p>
-            <a:pPr>
-              <a:spcAft>
-                <a:spcPts val="600"/>
-              </a:spcAft>
-            </a:pPr>
-            <a:r>
-              <a:rPr sz="1500">
-                <a:solidFill>
-                  <a:srgbClr val="22282E"/>
-                </a:solidFill>
-              </a:rPr>
-              <a:t>•  Explica con tus palabras la diferencia entre due care y due diligence.</a:t>
-            </a:r>
-          </a:p>
-          <a:p>
-            <a:pPr>
-              <a:spcAft>
-                <a:spcPts val="600"/>
-              </a:spcAft>
-            </a:pPr>
-            <a:r>
-              <a:rPr sz="1500">
-                <a:solidFill>
-                  <a:srgbClr val="22282E"/>
-                </a:solidFill>
-              </a:rPr>
-              <a:t>•  Mapea los 8 dominios a las partes del programa.</a:t>
-            </a:r>
-          </a:p>
-          <a:p>
-            <a:pPr>
-              <a:spcAft>
-                <a:spcPts val="600"/>
-              </a:spcAft>
-            </a:pPr>
-            <a:r>
-              <a:rPr sz="1500">
-                <a:solidFill>
-                  <a:srgbClr val="22282E"/>
-                </a:solidFill>
-              </a:rPr>
-              <a:t>•  Resuelve 20 preguntas de práctica y clasifica tus fallos por dominio.</a:t>
-            </a:r>
-          </a:p>
-          <a:p>
-            <a:pPr>
-              <a:spcAft>
-                <a:spcPts val="600"/>
-              </a:spcAft>
-            </a:pPr>
-            <a:r>
-              <a:rPr sz="1500">
-                <a:solidFill>
-                  <a:srgbClr val="22282E"/>
-                </a:solidFill>
-              </a:rPr>
-              <a:t>•  Redacta una política de clasificación de datos (D2) de una página.</a:t>
-            </a:r>
-          </a:p>
-          <a:p>
-            <a:pPr>
-              <a:spcAft>
-                <a:spcPts val="600"/>
-              </a:spcAft>
-            </a:pPr>
-            <a:r>
-              <a:rPr sz="1500">
-                <a:solidFill>
-                  <a:srgbClr val="22282E"/>
-                </a:solidFill>
-              </a:rPr>
-              <a:t>•  Diseña una matriz de riesgo simple (probabilidad × impacto) para un activo.</a:t>
+              <a:t>•  CBK (Common Body of Knowledge): temario canónico de (ISC)². Característica: organizado en 8 dominios con pesos definidos.</a:t>
+            </a:r>
+          </a:p>
+          <a:p>
+            <a:pPr>
+              <a:spcAft>
+                <a:spcPts val="600"/>
+              </a:spcAft>
+            </a:pPr>
+            <a:r>
+              <a:rPr sz="1500">
+                <a:solidFill>
+                  <a:srgbClr val="22282E"/>
+                </a:solidFill>
+              </a:rPr>
+              <a:t>•  CAT (Computer Adaptive Testing): formato del examen en inglés (100–150 preguntas). Característica: la dificultad se adapta a tus respuestas.</a:t>
+            </a:r>
+          </a:p>
+          <a:p>
+            <a:pPr>
+              <a:spcAft>
+                <a:spcPts val="600"/>
+              </a:spcAft>
+            </a:pPr>
+            <a:r>
+              <a:rPr sz="1500">
+                <a:solidFill>
+                  <a:srgbClr val="22282E"/>
+                </a:solidFill>
+              </a:rPr>
+              <a:t>•  Due care vs due diligence: cuidado razonable frente a investigación previa. Característica: concepto clave y muy preguntado.</a:t>
+            </a:r>
+          </a:p>
+          <a:p>
+            <a:pPr>
+              <a:spcAft>
+                <a:spcPts val="600"/>
+              </a:spcAft>
+            </a:pPr>
+            <a:r>
+              <a:rPr sz="1500">
+                <a:solidFill>
+                  <a:srgbClr val="22282E"/>
+                </a:solidFill>
+              </a:rPr>
+              <a:t>•  Risk = amenaza × vulnerabilidad × impacto: fórmula conceptual de riesgo. Característica: base del D1.</a:t>
+            </a:r>
+          </a:p>
+          <a:p>
+            <a:pPr>
+              <a:spcAft>
+                <a:spcPts val="600"/>
+              </a:spcAft>
+            </a:pPr>
+            <a:r>
+              <a:rPr sz="1500">
+                <a:solidFill>
+                  <a:srgbClr val="22282E"/>
+                </a:solidFill>
+              </a:rPr>
+              <a:t>•  Defense in depth: capas de control redundantes. Característica: principio transversal a todos los dominios.</a:t>
+            </a:r>
+          </a:p>
+          <a:p>
+            <a:pPr>
+              <a:spcAft>
+                <a:spcPts val="600"/>
+              </a:spcAft>
+            </a:pPr>
+            <a:r>
+              <a:rPr sz="1500">
+                <a:solidFill>
+                  <a:srgbClr val="22282E"/>
+                </a:solidFill>
+              </a:rPr>
+              <a:t>•  Endorsement: aval de 5 años de experiencia tras aprobar. Característica: sin él, quedas como Associate of (ISC)².</a:t>
             </a:r>
           </a:p>
         </p:txBody>
@@ -4763,7 +5124,7 @@
                   <a:srgbClr val="0B3D2E"/>
                 </a:solidFill>
               </a:rPr>
-              <a:t>📝 Reto verificable</a:t>
+              <a:t>🧰 Herramientas y preparación (ejercicio de GRC)</a:t>
             </a:r>
           </a:p>
         </p:txBody>
@@ -4801,22 +5162,67 @@
                   <a:srgbClr val="22282E"/>
                 </a:solidFill>
               </a:rPr>
-              <a:t>•  Entrega una matriz de preparación CISSP (plan-cissp.md) con: los 8 dominios, tu autoevaluación (1–5) por dominio, la brecha identificada, el mapeo a partes del programa y un plan de estudio semanal de 3–6 meses.</a:t>
-            </a:r>
-          </a:p>
-          <a:p>
-            <a:pPr>
-              <a:spcAft>
-                <a:spcPts val="600"/>
-              </a:spcAft>
-            </a:pPr>
-            <a:r>
-              <a:rPr sz="1500">
-                <a:solidFill>
-                  <a:srgbClr val="22282E"/>
-                </a:solidFill>
-              </a:rPr>
-              <a:t>•  Criterio de aceptación: los 8 dominios están cubiertos, cada uno tiene autoevaluación y plan, el mapeo a partes es coherente, y el plan prioriza las brechas mayores con fechas concretas.</a:t>
+              <a:t>•  No hay laboratorio técnico; el trabajo es de estudio y autoevaluación:</a:t>
+            </a:r>
+          </a:p>
+          <a:p>
+            <a:pPr>
+              <a:spcAft>
+                <a:spcPts val="600"/>
+              </a:spcAft>
+            </a:pPr>
+            <a:r>
+              <a:rPr sz="1500">
+                <a:solidFill>
+                  <a:srgbClr val="22282E"/>
+                </a:solidFill>
+              </a:rPr>
+              <a:t>•  Guía oficial (CISSP Official Study Guide) y práctica de preguntas (bancos oficiales).</a:t>
+            </a:r>
+          </a:p>
+          <a:p>
+            <a:pPr>
+              <a:spcAft>
+                <a:spcPts val="600"/>
+              </a:spcAft>
+            </a:pPr>
+            <a:r>
+              <a:rPr sz="1500">
+                <a:solidFill>
+                  <a:srgbClr val="22282E"/>
+                </a:solidFill>
+              </a:rPr>
+              <a:t>•  Una hoja de cálculo para la matriz de brechas por dominio.</a:t>
+            </a:r>
+          </a:p>
+          <a:p>
+            <a:pPr>
+              <a:spcAft>
+                <a:spcPts val="600"/>
+              </a:spcAft>
+            </a:pPr>
+            <a:r>
+              <a:rPr sz="1500">
+                <a:solidFill>
+                  <a:srgbClr val="22282E"/>
+                </a:solidFill>
+              </a:rPr>
+              <a:t>•  Mapas mentales por dominio (herramienta como XMind o papel).</a:t>
+            </a:r>
+          </a:p>
+          <a:p>
+            <a:pPr>
+              <a:spcAft>
+                <a:spcPts val="600"/>
+              </a:spcAft>
+            </a:pPr>
+            <a:r>
+              <a:rPr sz="1500">
+                <a:solidFill>
+                  <a:srgbClr val="22282E"/>
+                </a:solidFill>
+              </a:rPr>
+              <a:t>•  Tu registro de progreso de las Partes 1–15 para el mapeo.</a:t>
             </a:r>
           </a:p>
         </p:txBody>
